--- a/docs/Idaho_AI_Technical_Deck.pptx
+++ b/docs/Idaho_AI_Technical_Deck.pptx
@@ -16,7 +16,6 @@
     <p:sldId id="264" r:id="rId10"/>
     <p:sldId id="265" r:id="rId11"/>
     <p:sldId id="266" r:id="rId12"/>
-    <p:sldId id="267" r:id="rId13"/>
   </p:sldIdLst>
   <p:sldSz cx="9144000" cy="5143500" type="screen16x9"/>
   <p:notesSz cx="6858000" cy="9144000"/>
@@ -313,7 +312,7 @@
           <a:p>
             <a:fld id="{5BCAD085-E8A6-8845-BD4E-CB4CCA059FC4}" type="datetimeFigureOut">
               <a:rPr lang="en-US" smtClean="0"/>
-              <a:t>3/31/26</a:t>
+              <a:t>4/8/26</a:t>
             </a:fld>
             <a:endParaRPr lang="en-US"/>
           </a:p>
@@ -481,7 +480,7 @@
           <a:p>
             <a:fld id="{5BCAD085-E8A6-8845-BD4E-CB4CCA059FC4}" type="datetimeFigureOut">
               <a:rPr lang="en-US" smtClean="0"/>
-              <a:t>3/31/26</a:t>
+              <a:t>4/8/26</a:t>
             </a:fld>
             <a:endParaRPr lang="en-US"/>
           </a:p>
@@ -659,7 +658,7 @@
           <a:p>
             <a:fld id="{5BCAD085-E8A6-8845-BD4E-CB4CCA059FC4}" type="datetimeFigureOut">
               <a:rPr lang="en-US" smtClean="0"/>
-              <a:t>3/31/26</a:t>
+              <a:t>4/8/26</a:t>
             </a:fld>
             <a:endParaRPr lang="en-US"/>
           </a:p>
@@ -827,7 +826,7 @@
           <a:p>
             <a:fld id="{5BCAD085-E8A6-8845-BD4E-CB4CCA059FC4}" type="datetimeFigureOut">
               <a:rPr lang="en-US" smtClean="0"/>
-              <a:t>3/31/26</a:t>
+              <a:t>4/8/26</a:t>
             </a:fld>
             <a:endParaRPr lang="en-US"/>
           </a:p>
@@ -1072,7 +1071,7 @@
           <a:p>
             <a:fld id="{5BCAD085-E8A6-8845-BD4E-CB4CCA059FC4}" type="datetimeFigureOut">
               <a:rPr lang="en-US" smtClean="0"/>
-              <a:t>3/31/26</a:t>
+              <a:t>4/8/26</a:t>
             </a:fld>
             <a:endParaRPr lang="en-US"/>
           </a:p>
@@ -1357,7 +1356,7 @@
           <a:p>
             <a:fld id="{5BCAD085-E8A6-8845-BD4E-CB4CCA059FC4}" type="datetimeFigureOut">
               <a:rPr lang="en-US" smtClean="0"/>
-              <a:t>3/31/26</a:t>
+              <a:t>4/8/26</a:t>
             </a:fld>
             <a:endParaRPr lang="en-US"/>
           </a:p>
@@ -1776,7 +1775,7 @@
           <a:p>
             <a:fld id="{5BCAD085-E8A6-8845-BD4E-CB4CCA059FC4}" type="datetimeFigureOut">
               <a:rPr lang="en-US" smtClean="0"/>
-              <a:t>3/31/26</a:t>
+              <a:t>4/8/26</a:t>
             </a:fld>
             <a:endParaRPr lang="en-US"/>
           </a:p>
@@ -1893,7 +1892,7 @@
           <a:p>
             <a:fld id="{5BCAD085-E8A6-8845-BD4E-CB4CCA059FC4}" type="datetimeFigureOut">
               <a:rPr lang="en-US" smtClean="0"/>
-              <a:t>3/31/26</a:t>
+              <a:t>4/8/26</a:t>
             </a:fld>
             <a:endParaRPr lang="en-US"/>
           </a:p>
@@ -1988,7 +1987,7 @@
           <a:p>
             <a:fld id="{5BCAD085-E8A6-8845-BD4E-CB4CCA059FC4}" type="datetimeFigureOut">
               <a:rPr lang="en-US" smtClean="0"/>
-              <a:t>3/31/26</a:t>
+              <a:t>4/8/26</a:t>
             </a:fld>
             <a:endParaRPr lang="en-US"/>
           </a:p>
@@ -2263,7 +2262,7 @@
           <a:p>
             <a:fld id="{5BCAD085-E8A6-8845-BD4E-CB4CCA059FC4}" type="datetimeFigureOut">
               <a:rPr lang="en-US" smtClean="0"/>
-              <a:t>3/31/26</a:t>
+              <a:t>4/8/26</a:t>
             </a:fld>
             <a:endParaRPr lang="en-US"/>
           </a:p>
@@ -2515,7 +2514,7 @@
           <a:p>
             <a:fld id="{5BCAD085-E8A6-8845-BD4E-CB4CCA059FC4}" type="datetimeFigureOut">
               <a:rPr lang="en-US" smtClean="0"/>
-              <a:t>3/31/26</a:t>
+              <a:t>4/8/26</a:t>
             </a:fld>
             <a:endParaRPr lang="en-US"/>
           </a:p>
@@ -2726,7 +2725,7 @@
           <a:p>
             <a:fld id="{5BCAD085-E8A6-8845-BD4E-CB4CCA059FC4}" type="datetimeFigureOut">
               <a:rPr lang="en-US" smtClean="0"/>
-              <a:t>3/31/26</a:t>
+              <a:t>4/8/26</a:t>
             </a:fld>
             <a:endParaRPr lang="en-US"/>
           </a:p>
@@ -3341,7 +3340,7 @@
                 </a:solidFill>
                 <a:latin typeface="Consolas"/>
               </a:rPr>
-              <a:t>Stack: LangGraph · FastAPI · PostgreSQL · Neo4j · Qdrant · Redis · Ollama</a:t>
+              <a:t>Stack: LangGraph · FastAPI · Flask · PostgreSQL · Neo4j · Qdrant · Redis · Ollama (mistral:7b, gemma2:9b)</a:t>
             </a:r>
           </a:p>
         </p:txBody>
@@ -3411,7 +3410,7 @@
                 </a:solidFill>
                 <a:latin typeface="Calibri"/>
               </a:rPr>
-              <a:t>Version 1.0  |  March 2026</a:t>
+              <a:t>Version 2.0  |  April 2026</a:t>
             </a:r>
           </a:p>
         </p:txBody>
@@ -4537,11 +4536,11 @@
             <a:r>
               <a:rPr sz="900" b="1" i="0">
                 <a:solidFill>
-                  <a:srgbClr val="F59E0B"/>
+                  <a:srgbClr val="22C55E"/>
                 </a:solidFill>
                 <a:latin typeface="Calibri"/>
               </a:rPr>
-              <a:t>⚡ Active</a:t>
+              <a:t>✓ Complete</a:t>
             </a:r>
           </a:p>
         </p:txBody>
@@ -4611,7 +4610,7 @@
                 </a:solidFill>
                 <a:latin typeface="Calibri"/>
               </a:rPr>
-              <a:t>Intent → Planner → Router → [Parallel] → Reasoning → Answer</a:t>
+              <a:t>Intent → Planner → Router → IDHW → extract_ids → [IDJC|IDOC] → Reasoning → Answer</a:t>
             </a:r>
           </a:p>
         </p:txBody>
@@ -4848,7 +4847,7 @@
                 </a:solidFill>
                 <a:latin typeface="Calibri"/>
               </a:rPr>
-              <a:t>Entity Resolution</a:t>
+              <a:t>Cross-Agency Reasoning</a:t>
             </a:r>
           </a:p>
         </p:txBody>
@@ -4883,7 +4882,7 @@
                 </a:solidFill>
                 <a:latin typeface="Calibri"/>
               </a:rPr>
-              <a:t>Neo4j graph · insight_id matching · PARENT_OF relationships</a:t>
+              <a:t>Ephemeral graph · parent ID extraction · PARENT_OF edges · reasoning</a:t>
             </a:r>
           </a:p>
         </p:txBody>
@@ -5081,11 +5080,11 @@
             <a:r>
               <a:rPr sz="900" b="1" i="0">
                 <a:solidFill>
-                  <a:srgbClr val="94A3B8"/>
+                  <a:srgbClr val="F59E0B"/>
                 </a:solidFill>
                 <a:latin typeface="Calibri"/>
               </a:rPr>
-              <a:t>○ Planned</a:t>
+              <a:t>⚡ Active</a:t>
             </a:r>
           </a:p>
         </p:txBody>
@@ -5155,7 +5154,7 @@
                 </a:solidFill>
                 <a:latin typeface="Calibri"/>
               </a:rPr>
-              <a:t>Memory layer · Qdrant vectors · multi-turn conversation</a:t>
+              <a:t>MemorySaver · Flask Web UI · Qdrant vectors · multi-turn conversation</a:t>
             </a:r>
           </a:p>
         </p:txBody>
@@ -5422,7 +5421,7 @@
                 </a:solidFill>
                 <a:latin typeface="Consolas"/>
               </a:rPr>
-              <a:t>  "question": "How many foster children have incarcerated parents?",</a:t>
+              <a:t xml:space="preserve">  "question": "How many foster children have incarcerated parents?",</a:t>
             </a:r>
           </a:p>
           <a:p>
@@ -5433,7 +5432,7 @@
                 </a:solidFill>
                 <a:latin typeface="Consolas"/>
               </a:rPr>
-              <a:t>  "thread_id": "session-abc-123"</a:t>
+              <a:t xml:space="preserve">  "thread_id": "session-abc-123"</a:t>
             </a:r>
           </a:p>
           <a:p>
@@ -5485,7 +5484,7 @@
                 </a:solidFill>
                 <a:latin typeface="Consolas"/>
               </a:rPr>
-              <a:t>  "answer":    "Based on cross-agency analysis, 47 children...",</a:t>
+              <a:t xml:space="preserve">  "answer":    "Based on cross-agency analysis, 47 children...",</a:t>
             </a:r>
           </a:p>
           <a:p>
@@ -5496,7 +5495,7 @@
                 </a:solidFill>
                 <a:latin typeface="Consolas"/>
               </a:rPr>
-              <a:t>  "confidence": 0.91,</a:t>
+              <a:t xml:space="preserve">  "confidence": 0.91,</a:t>
             </a:r>
           </a:p>
           <a:p>
@@ -5507,7 +5506,7 @@
                 </a:solidFill>
                 <a:latin typeface="Consolas"/>
               </a:rPr>
-              <a:t>  "sources":   ["idhw", "idoc"],</a:t>
+              <a:t xml:space="preserve">  "sources":   ["idhw", "idoc"],</a:t>
             </a:r>
           </a:p>
           <a:p>
@@ -5518,7 +5517,7 @@
                 </a:solidFill>
                 <a:latin typeface="Consolas"/>
               </a:rPr>
-              <a:t>  "intent":    "cross_agency_count",</a:t>
+              <a:t xml:space="preserve">  "intent":    "cross_agency_count",</a:t>
             </a:r>
           </a:p>
           <a:p>
@@ -5529,7 +5528,7 @@
                 </a:solidFill>
                 <a:latin typeface="Consolas"/>
               </a:rPr>
-              <a:t>  "errors":    [],</a:t>
+              <a:t xml:space="preserve">  "errors":    [],</a:t>
             </a:r>
           </a:p>
           <a:p>
@@ -5540,7 +5539,7 @@
                 </a:solidFill>
                 <a:latin typeface="Consolas"/>
               </a:rPr>
-              <a:t>  "execution_trace": [</a:t>
+              <a:t xml:space="preserve">  "execution_trace": [</a:t>
             </a:r>
           </a:p>
           <a:p>
@@ -5551,7 +5550,7 @@
                 </a:solidFill>
                 <a:latin typeface="Consolas"/>
               </a:rPr>
-              <a:t>    "Starting query execution",</a:t>
+              <a:t xml:space="preserve">    "Starting query execution",</a:t>
             </a:r>
           </a:p>
           <a:p>
@@ -5562,7 +5561,7 @@
                 </a:solidFill>
                 <a:latin typeface="Consolas"/>
               </a:rPr>
-              <a:t>    "Routing to 2 agencies: [idhw, idoc]",</a:t>
+              <a:t xml:space="preserve">    "Routing to agencies: [idhw, idoc]",</a:t>
             </a:r>
           </a:p>
           <a:p>
@@ -5573,7 +5572,7 @@
                 </a:solidFill>
                 <a:latin typeface="Consolas"/>
               </a:rPr>
-              <a:t>    "IDHW family relationships: 312 found",</a:t>
+              <a:t xml:space="preserve">    "IDHW family relationships: 312 found",</a:t>
             </a:r>
           </a:p>
           <a:p>
@@ -5584,7 +5583,7 @@
                 </a:solidFill>
                 <a:latin typeface="Consolas"/>
               </a:rPr>
-              <a:t>    "IDOC cross-agency match: 47 people matched",</a:t>
+              <a:t xml:space="preserve">    "Extracted 156 parent IDs from family data",</a:t>
             </a:r>
           </a:p>
           <a:p>
@@ -5595,7 +5594,7 @@
                 </a:solidFill>
                 <a:latin typeface="Consolas"/>
               </a:rPr>
-              <a:t>    "Cross-agency identity resolution: 47 matched"</a:t>
+              <a:t xml:space="preserve">    "IDOC: 47 parents have incarceration records"</a:t>
             </a:r>
           </a:p>
           <a:p>
@@ -5606,7 +5605,7 @@
                 </a:solidFill>
                 <a:latin typeface="Consolas"/>
               </a:rPr>
-              <a:t>  ]</a:t>
+              <a:t xml:space="preserve">  ]</a:t>
             </a:r>
           </a:p>
           <a:p>
@@ -6215,907 +6214,6 @@
                 <a:latin typeface="Calibri"/>
               </a:rPr>
               <a:t>GET /audit/recent  —  returns last 100 queries with metadata</a:t>
-            </a:r>
-          </a:p>
-        </p:txBody>
-      </p:sp>
-    </p:spTree>
-  </p:cSld>
-  <p:clrMapOvr>
-    <a:masterClrMapping/>
-  </p:clrMapOvr>
-</p:sld>
-</file>
-
-<file path=ppt/slides/slide12.xml><?xml version="1.0" encoding="utf-8"?>
-<p:sld xmlns:a="http://schemas.openxmlformats.org/drawingml/2006/main" xmlns:r="http://schemas.openxmlformats.org/officeDocument/2006/relationships" xmlns:p="http://schemas.openxmlformats.org/presentationml/2006/main">
-  <p:cSld>
-    <p:bg>
-      <p:bgPr>
-        <a:solidFill>
-          <a:srgbClr val="1E293B"/>
-        </a:solidFill>
-        <a:effectLst/>
-      </p:bgPr>
-    </p:bg>
-    <p:spTree>
-      <p:nvGrpSpPr>
-        <p:cNvPr id="1" name=""/>
-        <p:cNvGrpSpPr/>
-        <p:nvPr/>
-      </p:nvGrpSpPr>
-      <p:grpSpPr>
-        <a:xfrm>
-          <a:off x="0" y="0"/>
-          <a:ext cx="0" cy="0"/>
-          <a:chOff x="0" y="0"/>
-          <a:chExt cx="0" cy="0"/>
-        </a:xfrm>
-      </p:grpSpPr>
-      <p:sp>
-        <p:nvSpPr>
-          <p:cNvPr id="2" name="Rectangle 1"/>
-          <p:cNvSpPr/>
-          <p:nvPr/>
-        </p:nvSpPr>
-        <p:spPr>
-          <a:xfrm>
-            <a:off x="0" y="0"/>
-            <a:ext cx="91440" cy="5143500"/>
-          </a:xfrm>
-          <a:prstGeom prst="rect">
-            <a:avLst/>
-          </a:prstGeom>
-          <a:solidFill>
-            <a:srgbClr val="0D9488"/>
-          </a:solidFill>
-          <a:ln>
-            <a:noFill/>
-          </a:ln>
-        </p:spPr>
-        <p:style>
-          <a:lnRef idx="1">
-            <a:schemeClr val="accent1"/>
-          </a:lnRef>
-          <a:fillRef idx="3">
-            <a:schemeClr val="accent1"/>
-          </a:fillRef>
-          <a:effectRef idx="2">
-            <a:schemeClr val="accent1"/>
-          </a:effectRef>
-          <a:fontRef idx="minor">
-            <a:schemeClr val="lt1"/>
-          </a:fontRef>
-        </p:style>
-        <p:txBody>
-          <a:bodyPr rtlCol="0" anchor="ctr"/>
-          <a:lstStyle/>
-          <a:p>
-            <a:pPr algn="ctr"/>
-            <a:endParaRPr/>
-          </a:p>
-        </p:txBody>
-      </p:sp>
-      <p:sp>
-        <p:nvSpPr>
-          <p:cNvPr id="3" name="Rectangle 2"/>
-          <p:cNvSpPr/>
-          <p:nvPr/>
-        </p:nvSpPr>
-        <p:spPr>
-          <a:xfrm>
-            <a:off x="0" y="5079492"/>
-            <a:ext cx="9144000" cy="64008"/>
-          </a:xfrm>
-          <a:prstGeom prst="rect">
-            <a:avLst/>
-          </a:prstGeom>
-          <a:solidFill>
-            <a:srgbClr val="0D9488"/>
-          </a:solidFill>
-          <a:ln>
-            <a:noFill/>
-          </a:ln>
-        </p:spPr>
-        <p:style>
-          <a:lnRef idx="1">
-            <a:schemeClr val="accent1"/>
-          </a:lnRef>
-          <a:fillRef idx="3">
-            <a:schemeClr val="accent1"/>
-          </a:fillRef>
-          <a:effectRef idx="2">
-            <a:schemeClr val="accent1"/>
-          </a:effectRef>
-          <a:fontRef idx="minor">
-            <a:schemeClr val="lt1"/>
-          </a:fontRef>
-        </p:style>
-        <p:txBody>
-          <a:bodyPr rtlCol="0" anchor="ctr"/>
-          <a:lstStyle/>
-          <a:p>
-            <a:pPr algn="ctr"/>
-            <a:endParaRPr/>
-          </a:p>
-        </p:txBody>
-      </p:sp>
-      <p:sp>
-        <p:nvSpPr>
-          <p:cNvPr id="4" name="TextBox 3"/>
-          <p:cNvSpPr txBox="1"/>
-          <p:nvPr/>
-        </p:nvSpPr>
-        <p:spPr>
-          <a:xfrm>
-            <a:off x="274320" y="320040"/>
-            <a:ext cx="8686800" cy="822960"/>
-          </a:xfrm>
-          <a:prstGeom prst="rect">
-            <a:avLst/>
-          </a:prstGeom>
-          <a:noFill/>
-        </p:spPr>
-        <p:txBody>
-          <a:bodyPr wrap="square">
-            <a:spAutoFit/>
-          </a:bodyPr>
-          <a:lstStyle/>
-          <a:p>
-            <a:pPr algn="l"/>
-            <a:r>
-              <a:rPr sz="3000" b="1" i="0">
-                <a:solidFill>
-                  <a:srgbClr val="FFFFFF"/>
-                </a:solidFill>
-                <a:latin typeface="Calibri"/>
-              </a:rPr>
-              <a:t>Current Status &amp; Next Steps</a:t>
-            </a:r>
-          </a:p>
-        </p:txBody>
-      </p:sp>
-      <p:sp>
-        <p:nvSpPr>
-          <p:cNvPr id="5" name="Rectangle 4"/>
-          <p:cNvSpPr/>
-          <p:nvPr/>
-        </p:nvSpPr>
-        <p:spPr>
-          <a:xfrm>
-            <a:off x="228600" y="1234440"/>
-            <a:ext cx="4846320" cy="3429000"/>
-          </a:xfrm>
-          <a:prstGeom prst="rect">
-            <a:avLst/>
-          </a:prstGeom>
-          <a:solidFill>
-            <a:srgbClr val="2D3B52"/>
-          </a:solidFill>
-          <a:ln>
-            <a:noFill/>
-          </a:ln>
-        </p:spPr>
-        <p:style>
-          <a:lnRef idx="1">
-            <a:schemeClr val="accent1"/>
-          </a:lnRef>
-          <a:fillRef idx="3">
-            <a:schemeClr val="accent1"/>
-          </a:fillRef>
-          <a:effectRef idx="2">
-            <a:schemeClr val="accent1"/>
-          </a:effectRef>
-          <a:fontRef idx="minor">
-            <a:schemeClr val="lt1"/>
-          </a:fontRef>
-        </p:style>
-        <p:txBody>
-          <a:bodyPr rtlCol="0" anchor="ctr"/>
-          <a:lstStyle/>
-          <a:p>
-            <a:pPr algn="ctr"/>
-            <a:endParaRPr/>
-          </a:p>
-        </p:txBody>
-      </p:sp>
-      <p:sp>
-        <p:nvSpPr>
-          <p:cNvPr id="6" name="Rectangle 5"/>
-          <p:cNvSpPr/>
-          <p:nvPr/>
-        </p:nvSpPr>
-        <p:spPr>
-          <a:xfrm>
-            <a:off x="228600" y="1234440"/>
-            <a:ext cx="4846320" cy="73152"/>
-          </a:xfrm>
-          <a:prstGeom prst="rect">
-            <a:avLst/>
-          </a:prstGeom>
-          <a:solidFill>
-            <a:srgbClr val="10B981"/>
-          </a:solidFill>
-          <a:ln>
-            <a:noFill/>
-          </a:ln>
-        </p:spPr>
-        <p:style>
-          <a:lnRef idx="1">
-            <a:schemeClr val="accent1"/>
-          </a:lnRef>
-          <a:fillRef idx="3">
-            <a:schemeClr val="accent1"/>
-          </a:fillRef>
-          <a:effectRef idx="2">
-            <a:schemeClr val="accent1"/>
-          </a:effectRef>
-          <a:fontRef idx="minor">
-            <a:schemeClr val="lt1"/>
-          </a:fontRef>
-        </p:style>
-        <p:txBody>
-          <a:bodyPr rtlCol="0" anchor="ctr"/>
-          <a:lstStyle/>
-          <a:p>
-            <a:pPr algn="ctr"/>
-            <a:endParaRPr/>
-          </a:p>
-        </p:txBody>
-      </p:sp>
-      <p:sp>
-        <p:nvSpPr>
-          <p:cNvPr id="7" name="TextBox 6"/>
-          <p:cNvSpPr txBox="1"/>
-          <p:nvPr/>
-        </p:nvSpPr>
-        <p:spPr>
-          <a:xfrm>
-            <a:off x="365760" y="1261872"/>
-            <a:ext cx="4572000" cy="347472"/>
-          </a:xfrm>
-          <a:prstGeom prst="rect">
-            <a:avLst/>
-          </a:prstGeom>
-          <a:noFill/>
-        </p:spPr>
-        <p:txBody>
-          <a:bodyPr wrap="square">
-            <a:spAutoFit/>
-          </a:bodyPr>
-          <a:lstStyle/>
-          <a:p>
-            <a:pPr algn="l"/>
-            <a:r>
-              <a:rPr sz="1300" b="1" i="0">
-                <a:solidFill>
-                  <a:srgbClr val="10B981"/>
-                </a:solidFill>
-                <a:latin typeface="Calibri"/>
-              </a:rPr>
-              <a:t>Current State</a:t>
-            </a:r>
-          </a:p>
-        </p:txBody>
-      </p:sp>
-      <p:sp>
-        <p:nvSpPr>
-          <p:cNvPr id="8" name="TextBox 7"/>
-          <p:cNvSpPr txBox="1"/>
-          <p:nvPr/>
-        </p:nvSpPr>
-        <p:spPr>
-          <a:xfrm>
-            <a:off x="365760" y="1691640"/>
-            <a:ext cx="4572000" cy="438912"/>
-          </a:xfrm>
-          <a:prstGeom prst="rect">
-            <a:avLst/>
-          </a:prstGeom>
-          <a:noFill/>
-        </p:spPr>
-        <p:txBody>
-          <a:bodyPr wrap="square">
-            <a:spAutoFit/>
-          </a:bodyPr>
-          <a:lstStyle/>
-          <a:p>
-            <a:pPr algn="l"/>
-            <a:r>
-              <a:rPr sz="1000" b="0" i="0">
-                <a:solidFill>
-                  <a:srgbClr val="10B981"/>
-                </a:solidFill>
-                <a:latin typeface="Calibri"/>
-              </a:rPr>
-              <a:t>✓  PostgreSQL: all 3 agency databases loaded with sample data</a:t>
-            </a:r>
-          </a:p>
-        </p:txBody>
-      </p:sp>
-      <p:sp>
-        <p:nvSpPr>
-          <p:cNvPr id="9" name="TextBox 8"/>
-          <p:cNvSpPr txBox="1"/>
-          <p:nvPr/>
-        </p:nvSpPr>
-        <p:spPr>
-          <a:xfrm>
-            <a:off x="365760" y="2194560"/>
-            <a:ext cx="4572000" cy="438912"/>
-          </a:xfrm>
-          <a:prstGeom prst="rect">
-            <a:avLst/>
-          </a:prstGeom>
-          <a:noFill/>
-        </p:spPr>
-        <p:txBody>
-          <a:bodyPr wrap="square">
-            <a:spAutoFit/>
-          </a:bodyPr>
-          <a:lstStyle/>
-          <a:p>
-            <a:pPr algn="l"/>
-            <a:r>
-              <a:rPr sz="1000" b="0" i="0">
-                <a:solidFill>
-                  <a:srgbClr val="10B981"/>
-                </a:solidFill>
-                <a:latin typeface="Calibri"/>
-              </a:rPr>
-              <a:t>✓  Neo4j, Qdrant, Redis: running in Docker</a:t>
-            </a:r>
-          </a:p>
-        </p:txBody>
-      </p:sp>
-      <p:sp>
-        <p:nvSpPr>
-          <p:cNvPr id="10" name="TextBox 9"/>
-          <p:cNvSpPr txBox="1"/>
-          <p:nvPr/>
-        </p:nvSpPr>
-        <p:spPr>
-          <a:xfrm>
-            <a:off x="365760" y="2697480"/>
-            <a:ext cx="4572000" cy="438912"/>
-          </a:xfrm>
-          <a:prstGeom prst="rect">
-            <a:avLst/>
-          </a:prstGeom>
-          <a:noFill/>
-        </p:spPr>
-        <p:txBody>
-          <a:bodyPr wrap="square">
-            <a:spAutoFit/>
-          </a:bodyPr>
-          <a:lstStyle/>
-          <a:p>
-            <a:pPr algn="l"/>
-            <a:r>
-              <a:rPr sz="1000" b="0" i="0">
-                <a:solidFill>
-                  <a:srgbClr val="10B981"/>
-                </a:solidFill>
-                <a:latin typeface="Calibri"/>
-              </a:rPr>
-              <a:t>✓  Controller API: running, /query endpoint functional</a:t>
-            </a:r>
-          </a:p>
-        </p:txBody>
-      </p:sp>
-      <p:sp>
-        <p:nvSpPr>
-          <p:cNvPr id="11" name="TextBox 10"/>
-          <p:cNvSpPr txBox="1"/>
-          <p:nvPr/>
-        </p:nvSpPr>
-        <p:spPr>
-          <a:xfrm>
-            <a:off x="365760" y="3200400"/>
-            <a:ext cx="4572000" cy="438912"/>
-          </a:xfrm>
-          <a:prstGeom prst="rect">
-            <a:avLst/>
-          </a:prstGeom>
-          <a:noFill/>
-        </p:spPr>
-        <p:txBody>
-          <a:bodyPr wrap="square">
-            <a:spAutoFit/>
-          </a:bodyPr>
-          <a:lstStyle/>
-          <a:p>
-            <a:pPr algn="l"/>
-            <a:r>
-              <a:rPr sz="1000" b="0" i="0">
-                <a:solidFill>
-                  <a:srgbClr val="10B981"/>
-                </a:solidFill>
-                <a:latin typeface="Calibri"/>
-              </a:rPr>
-              <a:t>✓  LangGraph DAG: intent→planner→router→agencies→reasoning→answer</a:t>
-            </a:r>
-          </a:p>
-        </p:txBody>
-      </p:sp>
-      <p:sp>
-        <p:nvSpPr>
-          <p:cNvPr id="12" name="TextBox 11"/>
-          <p:cNvSpPr txBox="1"/>
-          <p:nvPr/>
-        </p:nvSpPr>
-        <p:spPr>
-          <a:xfrm>
-            <a:off x="365760" y="3703320"/>
-            <a:ext cx="4572000" cy="438912"/>
-          </a:xfrm>
-          <a:prstGeom prst="rect">
-            <a:avLst/>
-          </a:prstGeom>
-          <a:noFill/>
-        </p:spPr>
-        <p:txBody>
-          <a:bodyPr wrap="square">
-            <a:spAutoFit/>
-          </a:bodyPr>
-          <a:lstStyle/>
-          <a:p>
-            <a:pPr algn="l"/>
-            <a:r>
-              <a:rPr sz="1000" b="0" i="0">
-                <a:solidFill>
-                  <a:srgbClr val="F59E0B"/>
-                </a:solidFill>
-                <a:latin typeface="Calibri"/>
-              </a:rPr>
-              <a:t>⚡  Agency MCP servers: Docker startup issue — qdrant_client.async_client</a:t>
-            </a:r>
-          </a:p>
-        </p:txBody>
-      </p:sp>
-      <p:sp>
-        <p:nvSpPr>
-          <p:cNvPr id="13" name="TextBox 12"/>
-          <p:cNvSpPr txBox="1"/>
-          <p:nvPr/>
-        </p:nvSpPr>
-        <p:spPr>
-          <a:xfrm>
-            <a:off x="365760" y="4206240"/>
-            <a:ext cx="4572000" cy="438912"/>
-          </a:xfrm>
-          <a:prstGeom prst="rect">
-            <a:avLst/>
-          </a:prstGeom>
-          <a:noFill/>
-        </p:spPr>
-        <p:txBody>
-          <a:bodyPr wrap="square">
-            <a:spAutoFit/>
-          </a:bodyPr>
-          <a:lstStyle/>
-          <a:p>
-            <a:pPr algn="l"/>
-            <a:r>
-              <a:rPr sz="1000" b="0" i="0">
-                <a:solidFill>
-                  <a:srgbClr val="F59E0B"/>
-                </a:solidFill>
-                <a:latin typeface="Calibri"/>
-              </a:rPr>
-              <a:t>⚡  Direct graph-query path: Neo4j Cypher available as fallback</a:t>
-            </a:r>
-          </a:p>
-        </p:txBody>
-      </p:sp>
-      <p:sp>
-        <p:nvSpPr>
-          <p:cNvPr id="14" name="Rectangle 13"/>
-          <p:cNvSpPr/>
-          <p:nvPr/>
-        </p:nvSpPr>
-        <p:spPr>
-          <a:xfrm>
-            <a:off x="5303520" y="1234440"/>
-            <a:ext cx="3657600" cy="3429000"/>
-          </a:xfrm>
-          <a:prstGeom prst="rect">
-            <a:avLst/>
-          </a:prstGeom>
-          <a:solidFill>
-            <a:srgbClr val="2D3B52"/>
-          </a:solidFill>
-          <a:ln>
-            <a:noFill/>
-          </a:ln>
-        </p:spPr>
-        <p:style>
-          <a:lnRef idx="1">
-            <a:schemeClr val="accent1"/>
-          </a:lnRef>
-          <a:fillRef idx="3">
-            <a:schemeClr val="accent1"/>
-          </a:fillRef>
-          <a:effectRef idx="2">
-            <a:schemeClr val="accent1"/>
-          </a:effectRef>
-          <a:fontRef idx="minor">
-            <a:schemeClr val="lt1"/>
-          </a:fontRef>
-        </p:style>
-        <p:txBody>
-          <a:bodyPr rtlCol="0" anchor="ctr"/>
-          <a:lstStyle/>
-          <a:p>
-            <a:pPr algn="ctr"/>
-            <a:endParaRPr/>
-          </a:p>
-        </p:txBody>
-      </p:sp>
-      <p:sp>
-        <p:nvSpPr>
-          <p:cNvPr id="15" name="Rectangle 14"/>
-          <p:cNvSpPr/>
-          <p:nvPr/>
-        </p:nvSpPr>
-        <p:spPr>
-          <a:xfrm>
-            <a:off x="5303520" y="1234440"/>
-            <a:ext cx="3657600" cy="73152"/>
-          </a:xfrm>
-          <a:prstGeom prst="rect">
-            <a:avLst/>
-          </a:prstGeom>
-          <a:solidFill>
-            <a:srgbClr val="F59E0B"/>
-          </a:solidFill>
-          <a:ln>
-            <a:noFill/>
-          </a:ln>
-        </p:spPr>
-        <p:style>
-          <a:lnRef idx="1">
-            <a:schemeClr val="accent1"/>
-          </a:lnRef>
-          <a:fillRef idx="3">
-            <a:schemeClr val="accent1"/>
-          </a:fillRef>
-          <a:effectRef idx="2">
-            <a:schemeClr val="accent1"/>
-          </a:effectRef>
-          <a:fontRef idx="minor">
-            <a:schemeClr val="lt1"/>
-          </a:fontRef>
-        </p:style>
-        <p:txBody>
-          <a:bodyPr rtlCol="0" anchor="ctr"/>
-          <a:lstStyle/>
-          <a:p>
-            <a:pPr algn="ctr"/>
-            <a:endParaRPr/>
-          </a:p>
-        </p:txBody>
-      </p:sp>
-      <p:sp>
-        <p:nvSpPr>
-          <p:cNvPr id="16" name="TextBox 15"/>
-          <p:cNvSpPr txBox="1"/>
-          <p:nvPr/>
-        </p:nvSpPr>
-        <p:spPr>
-          <a:xfrm>
-            <a:off x="5440680" y="1261872"/>
-            <a:ext cx="3474720" cy="347472"/>
-          </a:xfrm>
-          <a:prstGeom prst="rect">
-            <a:avLst/>
-          </a:prstGeom>
-          <a:noFill/>
-        </p:spPr>
-        <p:txBody>
-          <a:bodyPr wrap="square">
-            <a:spAutoFit/>
-          </a:bodyPr>
-          <a:lstStyle/>
-          <a:p>
-            <a:pPr algn="l"/>
-            <a:r>
-              <a:rPr sz="1300" b="1" i="0">
-                <a:solidFill>
-                  <a:srgbClr val="F59E0B"/>
-                </a:solidFill>
-                <a:latin typeface="Calibri"/>
-              </a:rPr>
-              <a:t>Next Steps</a:t>
-            </a:r>
-          </a:p>
-        </p:txBody>
-      </p:sp>
-      <p:sp>
-        <p:nvSpPr>
-          <p:cNvPr id="17" name="TextBox 16"/>
-          <p:cNvSpPr txBox="1"/>
-          <p:nvPr/>
-        </p:nvSpPr>
-        <p:spPr>
-          <a:xfrm>
-            <a:off x="5440680" y="1691640"/>
-            <a:ext cx="3474720" cy="438912"/>
-          </a:xfrm>
-          <a:prstGeom prst="rect">
-            <a:avLst/>
-          </a:prstGeom>
-          <a:noFill/>
-        </p:spPr>
-        <p:txBody>
-          <a:bodyPr wrap="square">
-            <a:spAutoFit/>
-          </a:bodyPr>
-          <a:lstStyle/>
-          <a:p>
-            <a:pPr algn="l"/>
-            <a:r>
-              <a:rPr sz="1000" b="0" i="0">
-                <a:solidFill>
-                  <a:srgbClr val="FFFFFF"/>
-                </a:solidFill>
-                <a:latin typeface="Calibri"/>
-              </a:rPr>
-              <a:t>1. Fix qdrant_client version in agent Dockerfiles</a:t>
-            </a:r>
-          </a:p>
-        </p:txBody>
-      </p:sp>
-      <p:sp>
-        <p:nvSpPr>
-          <p:cNvPr id="18" name="TextBox 17"/>
-          <p:cNvSpPr txBox="1"/>
-          <p:nvPr/>
-        </p:nvSpPr>
-        <p:spPr>
-          <a:xfrm>
-            <a:off x="5440680" y="2194560"/>
-            <a:ext cx="3474720" cy="438912"/>
-          </a:xfrm>
-          <a:prstGeom prst="rect">
-            <a:avLst/>
-          </a:prstGeom>
-          <a:noFill/>
-        </p:spPr>
-        <p:txBody>
-          <a:bodyPr wrap="square">
-            <a:spAutoFit/>
-          </a:bodyPr>
-          <a:lstStyle/>
-          <a:p>
-            <a:pPr algn="l"/>
-            <a:r>
-              <a:rPr sz="1000" b="0" i="0">
-                <a:solidFill>
-                  <a:srgbClr val="FFFFFF"/>
-                </a:solidFill>
-                <a:latin typeface="Calibri"/>
-              </a:rPr>
-              <a:t>2. Run full integration test: /query end-to-end</a:t>
-            </a:r>
-          </a:p>
-        </p:txBody>
-      </p:sp>
-      <p:sp>
-        <p:nvSpPr>
-          <p:cNvPr id="19" name="TextBox 18"/>
-          <p:cNvSpPr txBox="1"/>
-          <p:nvPr/>
-        </p:nvSpPr>
-        <p:spPr>
-          <a:xfrm>
-            <a:off x="5440680" y="2697480"/>
-            <a:ext cx="3474720" cy="438912"/>
-          </a:xfrm>
-          <a:prstGeom prst="rect">
-            <a:avLst/>
-          </a:prstGeom>
-          <a:noFill/>
-        </p:spPr>
-        <p:txBody>
-          <a:bodyPr wrap="square">
-            <a:spAutoFit/>
-          </a:bodyPr>
-          <a:lstStyle/>
-          <a:p>
-            <a:pPr algn="l"/>
-            <a:r>
-              <a:rPr sz="1000" b="0" i="0">
-                <a:solidFill>
-                  <a:srgbClr val="FFFFFF"/>
-                </a:solidFill>
-                <a:latin typeface="Calibri"/>
-              </a:rPr>
-              <a:t>3. Load real Idaho agency data (production CSV)</a:t>
-            </a:r>
-          </a:p>
-        </p:txBody>
-      </p:sp>
-      <p:sp>
-        <p:nvSpPr>
-          <p:cNvPr id="20" name="TextBox 19"/>
-          <p:cNvSpPr txBox="1"/>
-          <p:nvPr/>
-        </p:nvSpPr>
-        <p:spPr>
-          <a:xfrm>
-            <a:off x="5440680" y="3200400"/>
-            <a:ext cx="3474720" cy="438912"/>
-          </a:xfrm>
-          <a:prstGeom prst="rect">
-            <a:avLst/>
-          </a:prstGeom>
-          <a:noFill/>
-        </p:spPr>
-        <p:txBody>
-          <a:bodyPr wrap="square">
-            <a:spAutoFit/>
-          </a:bodyPr>
-          <a:lstStyle/>
-          <a:p>
-            <a:pPr algn="l"/>
-            <a:r>
-              <a:rPr sz="1000" b="0" i="0">
-                <a:solidFill>
-                  <a:srgbClr val="FFFFFF"/>
-                </a:solidFill>
-                <a:latin typeface="Calibri"/>
-              </a:rPr>
-              <a:t>4. Enable Qdrant semantic search in reasoning node</a:t>
-            </a:r>
-          </a:p>
-        </p:txBody>
-      </p:sp>
-      <p:sp>
-        <p:nvSpPr>
-          <p:cNvPr id="21" name="TextBox 20"/>
-          <p:cNvSpPr txBox="1"/>
-          <p:nvPr/>
-        </p:nvSpPr>
-        <p:spPr>
-          <a:xfrm>
-            <a:off x="5440680" y="3703320"/>
-            <a:ext cx="3474720" cy="438912"/>
-          </a:xfrm>
-          <a:prstGeom prst="rect">
-            <a:avLst/>
-          </a:prstGeom>
-          <a:noFill/>
-        </p:spPr>
-        <p:txBody>
-          <a:bodyPr wrap="square">
-            <a:spAutoFit/>
-          </a:bodyPr>
-          <a:lstStyle/>
-          <a:p>
-            <a:pPr algn="l"/>
-            <a:r>
-              <a:rPr sz="1000" b="0" i="0">
-                <a:solidFill>
-                  <a:srgbClr val="FFFFFF"/>
-                </a:solidFill>
-                <a:latin typeface="Calibri"/>
-              </a:rPr>
-              <a:t>5. Build analytics dashboard on /audit endpoint</a:t>
-            </a:r>
-          </a:p>
-        </p:txBody>
-      </p:sp>
-      <p:sp>
-        <p:nvSpPr>
-          <p:cNvPr id="22" name="TextBox 21"/>
-          <p:cNvSpPr txBox="1"/>
-          <p:nvPr/>
-        </p:nvSpPr>
-        <p:spPr>
-          <a:xfrm>
-            <a:off x="5440680" y="4206240"/>
-            <a:ext cx="3474720" cy="438912"/>
-          </a:xfrm>
-          <a:prstGeom prst="rect">
-            <a:avLst/>
-          </a:prstGeom>
-          <a:noFill/>
-        </p:spPr>
-        <p:txBody>
-          <a:bodyPr wrap="square">
-            <a:spAutoFit/>
-          </a:bodyPr>
-          <a:lstStyle/>
-          <a:p>
-            <a:pPr algn="l"/>
-            <a:r>
-              <a:rPr sz="1000" b="0" i="0">
-                <a:solidFill>
-                  <a:srgbClr val="FFFFFF"/>
-                </a:solidFill>
-                <a:latin typeface="Calibri"/>
-              </a:rPr>
-              <a:t>6. Implement role-based access control per agency</a:t>
-            </a:r>
-          </a:p>
-        </p:txBody>
-      </p:sp>
-      <p:sp>
-        <p:nvSpPr>
-          <p:cNvPr id="23" name="Rectangle 22"/>
-          <p:cNvSpPr/>
-          <p:nvPr/>
-        </p:nvSpPr>
-        <p:spPr>
-          <a:xfrm>
-            <a:off x="228600" y="4709160"/>
-            <a:ext cx="8732520" cy="338328"/>
-          </a:xfrm>
-          <a:prstGeom prst="rect">
-            <a:avLst/>
-          </a:prstGeom>
-          <a:solidFill>
-            <a:srgbClr val="2D3B52"/>
-          </a:solidFill>
-          <a:ln>
-            <a:noFill/>
-          </a:ln>
-        </p:spPr>
-        <p:style>
-          <a:lnRef idx="1">
-            <a:schemeClr val="accent1"/>
-          </a:lnRef>
-          <a:fillRef idx="3">
-            <a:schemeClr val="accent1"/>
-          </a:fillRef>
-          <a:effectRef idx="2">
-            <a:schemeClr val="accent1"/>
-          </a:effectRef>
-          <a:fontRef idx="minor">
-            <a:schemeClr val="lt1"/>
-          </a:fontRef>
-        </p:style>
-        <p:txBody>
-          <a:bodyPr rtlCol="0" anchor="ctr"/>
-          <a:lstStyle/>
-          <a:p>
-            <a:pPr algn="ctr"/>
-            <a:endParaRPr/>
-          </a:p>
-        </p:txBody>
-      </p:sp>
-      <p:sp>
-        <p:nvSpPr>
-          <p:cNvPr id="24" name="TextBox 23"/>
-          <p:cNvSpPr txBox="1"/>
-          <p:nvPr/>
-        </p:nvSpPr>
-        <p:spPr>
-          <a:xfrm>
-            <a:off x="365760" y="4754880"/>
-            <a:ext cx="8503920" cy="256032"/>
-          </a:xfrm>
-          <a:prstGeom prst="rect">
-            <a:avLst/>
-          </a:prstGeom>
-          <a:noFill/>
-        </p:spPr>
-        <p:txBody>
-          <a:bodyPr wrap="square">
-            <a:spAutoFit/>
-          </a:bodyPr>
-          <a:lstStyle/>
-          <a:p>
-            <a:pPr algn="l"/>
-            <a:r>
-              <a:rPr sz="900" b="0" i="0">
-                <a:solidFill>
-                  <a:srgbClr val="94A3B8"/>
-                </a:solidFill>
-                <a:latin typeface="Consolas"/>
-              </a:rPr>
-              <a:t>Repo: federated_idaho/src/  |  Docs: docs/  |  Stack: docker compose up -d  |  CLI: python3 main.py</a:t>
             </a:r>
           </a:p>
         </p:txBody>
@@ -7552,7 +6650,7 @@
                 </a:solidFill>
                 <a:latin typeface="Consolas"/>
               </a:rPr>
-              <a:t>LangGraph Controller  (intent → planner → router → [parallel] → reasoning → answer)</a:t>
+              <a:t>LangGraph Controller  (intent → planner → router → idhw → extract_ids → [idjc|idoc] → reasoning → answer)</a:t>
             </a:r>
           </a:p>
         </p:txBody>
@@ -8697,8 +7795,8 @@
                 </a:solidFill>
                 <a:latin typeface="Consolas"/>
               </a:rPr>
-              <a:t>Ollama LLM
-Host (not Docker)</a:t>
+              <a:t>Ollama LLM (mistral:7b + gemma2:9b)
+Host (not Docker) | Flask Web UI: 5056</a:t>
             </a:r>
           </a:p>
         </p:txBody>
@@ -9400,8 +8498,9 @@
                 </a:solidFill>
                 <a:latin typeface="Calibri"/>
               </a:rPr>
-              <a:t>[PARALLEL] Returns partial dict
-keys: idhw_data, sources, errors</a:t>
+              <a:t>[SEQUENTIAL] Returns partial dict
+keys: idhw_data, sources, errors
+→ extract_parent_ids_node</a:t>
             </a:r>
           </a:p>
         </p:txBody>
@@ -9516,7 +8615,7 @@
                 <a:latin typeface="Calibri"/>
               </a:rPr>
               <a:t>[PARALLEL] Returns partial dict
-keys: idjc_data, sources, errors</a:t>
+keys: idjc_data, juvenile_ids, errors</a:t>
             </a:r>
           </a:p>
         </p:txBody>
@@ -9631,7 +8730,7 @@
                 <a:latin typeface="Calibri"/>
               </a:rPr>
               <a:t>[PARALLEL] Returns partial dict
-keys: idoc_data, sources, errors</a:t>
+keys: idoc_data, incarcerated_ids, errors</a:t>
             </a:r>
           </a:p>
         </p:txBody>
@@ -9877,7 +8976,7 @@
                 </a:solidFill>
                 <a:latin typeface="Calibri"/>
               </a:rPr>
-              <a:t>Cross-agency identity matching via insight_id</a:t>
+              <a:t>Ephemeral graph: builds PARENT_OF edges, counts cross-agency matches</a:t>
             </a:r>
           </a:p>
         </p:txBody>
@@ -10079,7 +9178,7 @@
                 </a:solidFill>
                 <a:latin typeface="Calibri"/>
               </a:rPr>
-              <a:t>⚠  Parallel nodes use Annotated[list, operator.add] reducers — avoids INVALID_CONCURRENT_GRAPH_UPDATE</a:t>
+              <a:t>⚠  IDHW runs first (sequential), then IDJC+IDOC in parallel after extract_parent_ids_node</a:t>
             </a:r>
           </a:p>
         </p:txBody>
@@ -10324,7 +9423,7 @@
                 </a:solidFill>
                 <a:latin typeface="Consolas"/>
               </a:rPr>
-              <a:t>    # Inputs</a:t>
+              <a:t xml:space="preserve">    # Inputs</a:t>
             </a:r>
           </a:p>
           <a:p>
@@ -10335,7 +9434,7 @@
                 </a:solidFill>
                 <a:latin typeface="Consolas"/>
               </a:rPr>
-              <a:t>    question:        str</a:t>
+              <a:t xml:space="preserve">    question:        str</a:t>
             </a:r>
           </a:p>
           <a:p>
@@ -10346,7 +9445,7 @@
                 </a:solidFill>
                 <a:latin typeface="Consolas"/>
               </a:rPr>
-              <a:t>    intent:          Optional[QueryIntent]</a:t>
+              <a:t xml:space="preserve">    intent:          Optional[QueryIntent]</a:t>
             </a:r>
           </a:p>
           <a:p>
@@ -10357,7 +9456,7 @@
                 </a:solidFill>
                 <a:latin typeface="Consolas"/>
               </a:rPr>
-              <a:t>    plan:            list[str]</a:t>
+              <a:t xml:space="preserve">    plan:            list[str]</a:t>
             </a:r>
           </a:p>
           <a:p>
@@ -10368,7 +9467,7 @@
                 </a:solidFill>
                 <a:latin typeface="Consolas"/>
               </a:rPr>
-              <a:t>    agencies:        list[AgencyName]</a:t>
+              <a:t xml:space="preserve">    agencies:        list[AgencyName]</a:t>
             </a:r>
           </a:p>
           <a:p>
@@ -10379,7 +9478,7 @@
                 </a:solidFill>
                 <a:latin typeface="Consolas"/>
               </a:rPr>
-              <a:t>    </a:t>
+              <a:t xml:space="preserve">    </a:t>
             </a:r>
           </a:p>
           <a:p>
@@ -10390,7 +9489,7 @@
                 </a:solidFill>
                 <a:latin typeface="Consolas"/>
               </a:rPr>
-              <a:t>    # Agency results (written by parallel nodes)</a:t>
+              <a:t xml:space="preserve">    # Agency results (written by parallel nodes)</a:t>
             </a:r>
           </a:p>
           <a:p>
@@ -10401,7 +9500,7 @@
                 </a:solidFill>
                 <a:latin typeface="Consolas"/>
               </a:rPr>
-              <a:t>    idhw_data:       dict[str, Any]</a:t>
+              <a:t xml:space="preserve">    idhw_data:       dict[str, Any]</a:t>
             </a:r>
           </a:p>
           <a:p>
@@ -10412,7 +9511,7 @@
                 </a:solidFill>
                 <a:latin typeface="Consolas"/>
               </a:rPr>
-              <a:t>    idjc_data:       dict[str, Any]</a:t>
+              <a:t xml:space="preserve">    idjc_data:       dict[str, Any]</a:t>
             </a:r>
           </a:p>
           <a:p>
@@ -10423,7 +9522,7 @@
                 </a:solidFill>
                 <a:latin typeface="Consolas"/>
               </a:rPr>
-              <a:t>    idoc_data:       dict[str, Any]</a:t>
+              <a:t xml:space="preserve">    idoc_data:       dict[str, Any]</a:t>
             </a:r>
           </a:p>
           <a:p>
@@ -10434,7 +9533,7 @@
                 </a:solidFill>
                 <a:latin typeface="Consolas"/>
               </a:rPr>
-              <a:t>    </a:t>
+              <a:t xml:space="preserve">    </a:t>
             </a:r>
           </a:p>
           <a:p>
@@ -10445,7 +9544,10 @@
                 </a:solidFill>
                 <a:latin typeface="Consolas"/>
               </a:rPr>
-              <a:t>    # Cross-agency reasoning</a:t>
+              <a:t xml:space="preserve">    # Parent linkage (from extract_parent_ids_node)
+    parent_ids:      list[str]
+    child_to_parents: dict[str, list]
+    # Cross-agency reasoning</a:t>
             </a:r>
           </a:p>
           <a:p>
@@ -10456,7 +9558,7 @@
                 </a:solidFill>
                 <a:latin typeface="Consolas"/>
               </a:rPr>
-              <a:t>    identity_matches: dict[str, Any]</a:t>
+              <a:t xml:space="preserve">    identity_matches: dict[str, Any]</a:t>
             </a:r>
           </a:p>
           <a:p>
@@ -10467,7 +9569,7 @@
                 </a:solidFill>
                 <a:latin typeface="Consolas"/>
               </a:rPr>
-              <a:t>    reasoning_result: dict[str, Any]</a:t>
+              <a:t xml:space="preserve">    reasoning_result: dict[str, Any]</a:t>
             </a:r>
           </a:p>
           <a:p>
@@ -10478,7 +9580,7 @@
                 </a:solidFill>
                 <a:latin typeface="Consolas"/>
               </a:rPr>
-              <a:t>    </a:t>
+              <a:t xml:space="preserve">    </a:t>
             </a:r>
           </a:p>
           <a:p>
@@ -10489,7 +9591,7 @@
                 </a:solidFill>
                 <a:latin typeface="Consolas"/>
               </a:rPr>
-              <a:t>    # Outputs — Annotated reducers required for parallel safety</a:t>
+              <a:t xml:space="preserve">    # Outputs — Annotated reducers required for parallel safety</a:t>
             </a:r>
           </a:p>
           <a:p>
@@ -10500,7 +9602,7 @@
                 </a:solidFill>
                 <a:latin typeface="Consolas"/>
               </a:rPr>
-              <a:t>    answer:          str</a:t>
+              <a:t xml:space="preserve">    answer:          str</a:t>
             </a:r>
           </a:p>
           <a:p>
@@ -10511,7 +9613,7 @@
                 </a:solidFill>
                 <a:latin typeface="Consolas"/>
               </a:rPr>
-              <a:t>    confidence:      float</a:t>
+              <a:t xml:space="preserve">    confidence:      float</a:t>
             </a:r>
           </a:p>
           <a:p>
@@ -10522,7 +9624,7 @@
                 </a:solidFill>
                 <a:latin typeface="Consolas"/>
               </a:rPr>
-              <a:t>    sources:         Annotated[list[str], operator.add]</a:t>
+              <a:t xml:space="preserve">    sources:         Annotated[list[str], operator.add]</a:t>
             </a:r>
           </a:p>
           <a:p>
@@ -10533,7 +9635,7 @@
                 </a:solidFill>
                 <a:latin typeface="Consolas"/>
               </a:rPr>
-              <a:t>    errors:          Annotated[list[str], operator.add]</a:t>
+              <a:t xml:space="preserve">    errors:          Annotated[list[str], operator.add]</a:t>
             </a:r>
           </a:p>
           <a:p>
@@ -10544,7 +9646,7 @@
                 </a:solidFill>
                 <a:latin typeface="Consolas"/>
               </a:rPr>
-              <a:t>    execution_trace: Annotated[list[str], operator.add]</a:t>
+              <a:t xml:space="preserve">    execution_trace: Annotated[list[str], operator.add]</a:t>
             </a:r>
           </a:p>
         </p:txBody>
@@ -12918,7 +12020,7 @@
                 </a:solidFill>
                 <a:latin typeface="Consolas"/>
               </a:rPr>
-              <a:t>  "tool_name": "get_people_bulk",</a:t>
+              <a:t xml:space="preserve">  "tool_name": "get_people_bulk",</a:t>
             </a:r>
           </a:p>
           <a:p>
@@ -12929,7 +12031,7 @@
                 </a:solidFill>
                 <a:latin typeface="Consolas"/>
               </a:rPr>
-              <a:t>  "params": {</a:t>
+              <a:t xml:space="preserve">  "params": {</a:t>
             </a:r>
           </a:p>
           <a:p>
@@ -12940,7 +12042,7 @@
                 </a:solidFill>
                 <a:latin typeface="Consolas"/>
               </a:rPr>
-              <a:t>    "insight_ids": ["abc123", "def456"]</a:t>
+              <a:t xml:space="preserve">    "insight_ids": ["abc123", "def456"]</a:t>
             </a:r>
           </a:p>
           <a:p>
@@ -12951,7 +12053,7 @@
                 </a:solidFill>
                 <a:latin typeface="Consolas"/>
               </a:rPr>
-              <a:t>  }</a:t>
+              <a:t xml:space="preserve">  }</a:t>
             </a:r>
           </a:p>
           <a:p>
@@ -13003,7 +12105,7 @@
                 </a:solidFill>
                 <a:latin typeface="Consolas"/>
               </a:rPr>
-              <a:t>  "status": "success",</a:t>
+              <a:t xml:space="preserve">  "status": "success",</a:t>
             </a:r>
           </a:p>
           <a:p>
@@ -13014,7 +12116,7 @@
                 </a:solidFill>
                 <a:latin typeface="Consolas"/>
               </a:rPr>
-              <a:t>  "tool": "get_people_bulk",</a:t>
+              <a:t xml:space="preserve">  "tool": "get_people_bulk",</a:t>
             </a:r>
           </a:p>
           <a:p>
@@ -13025,7 +12127,7 @@
                 </a:solidFill>
                 <a:latin typeface="Consolas"/>
               </a:rPr>
-              <a:t>  "result": [</a:t>
+              <a:t xml:space="preserve">  "result": [</a:t>
             </a:r>
           </a:p>
           <a:p>
@@ -13036,7 +12138,7 @@
                 </a:solidFill>
                 <a:latin typeface="Consolas"/>
               </a:rPr>
-              <a:t>    {"insight_id": "abc123", ...},</a:t>
+              <a:t xml:space="preserve">    {"insight_id": "abc123", ...},</a:t>
             </a:r>
           </a:p>
           <a:p>
@@ -13047,7 +12149,7 @@
                 </a:solidFill>
                 <a:latin typeface="Consolas"/>
               </a:rPr>
-              <a:t>  ]</a:t>
+              <a:t xml:space="preserve">  ]</a:t>
             </a:r>
           </a:p>
           <a:p>
@@ -15440,7 +14542,7 @@
                 </a:solidFill>
                 <a:latin typeface="Consolas"/>
               </a:rPr>
-              <a:t>first_name, last_name</a:t>
+              <a:t>dob_month, dob_year</a:t>
             </a:r>
           </a:p>
         </p:txBody>
@@ -15475,7 +14577,7 @@
                 </a:solidFill>
                 <a:latin typeface="Consolas"/>
               </a:rPr>
-              <a:t>dob, gender, ssn</a:t>
+              <a:t>person_type, gender</a:t>
             </a:r>
           </a:p>
         </p:txBody>
@@ -15809,7 +14911,7 @@
                 </a:solidFill>
                 <a:latin typeface="Consolas"/>
               </a:rPr>
-              <a:t>first_name, last_name</a:t>
+              <a:t>dob_month, dob_year</a:t>
             </a:r>
           </a:p>
         </p:txBody>
@@ -15844,7 +14946,7 @@
                 </a:solidFill>
                 <a:latin typeface="Consolas"/>
               </a:rPr>
-              <a:t>dob, ssn</a:t>
+              <a:t>dob_month, dob_year, gender</a:t>
             </a:r>
           </a:p>
         </p:txBody>
@@ -16283,7 +15385,7 @@
                 </a:solidFill>
                 <a:latin typeface="Consolas"/>
               </a:rPr>
-              <a:t>fnam, lnam</a:t>
+              <a:t>dob_month, dob_year, gender</a:t>
             </a:r>
           </a:p>
         </p:txBody>
@@ -16318,7 +15420,7 @@
                 </a:solidFill>
                 <a:latin typeface="Consolas"/>
               </a:rPr>
-              <a:t>dob_dtd, ssn_nbr</a:t>
+              <a:t>state, cnty_sdesc</a:t>
             </a:r>
           </a:p>
         </p:txBody>
@@ -19209,7 +18311,7 @@
                 </a:solidFill>
                 <a:latin typeface="Consolas"/>
               </a:rPr>
-              <a:t>0.99</a:t>
+              <a:t>0.98</a:t>
             </a:r>
           </a:p>
         </p:txBody>
@@ -19244,7 +18346,7 @@
                 </a:solidFill>
                 <a:latin typeface="Calibri"/>
               </a:rPr>
-              <a:t>SSN match</a:t>
+              <a:t>PARENT_OF edge</a:t>
             </a:r>
           </a:p>
         </p:txBody>
@@ -19279,7 +18381,7 @@
                 </a:solidFill>
                 <a:latin typeface="Calibri"/>
               </a:rPr>
-              <a:t>Very high confidence — federal ID</a:t>
+              <a:t>Family link via mother/father insight_id</a:t>
             </a:r>
           </a:p>
         </p:txBody>
@@ -19358,7 +18460,7 @@
                 </a:solidFill>
                 <a:latin typeface="Consolas"/>
               </a:rPr>
-              <a:t>0.95</a:t>
+              <a:t>0.90</a:t>
             </a:r>
           </a:p>
         </p:txBody>
@@ -19393,7 +18495,7 @@
                 </a:solidFill>
                 <a:latin typeface="Calibri"/>
               </a:rPr>
-              <a:t>Name + DOB</a:t>
+              <a:t>IN_AGENCY edge</a:t>
             </a:r>
           </a:p>
         </p:txBody>
@@ -19428,7 +18530,7 @@
                 </a:solidFill>
                 <a:latin typeface="Calibri"/>
               </a:rPr>
-              <a:t>High confidence — if both match exactly</a:t>
+              <a:t>Person present in agency database</a:t>
             </a:r>
           </a:p>
         </p:txBody>
@@ -19542,7 +18644,7 @@
                 </a:solidFill>
                 <a:latin typeface="Calibri"/>
               </a:rPr>
-              <a:t>Fallback</a:t>
+              <a:t>No match</a:t>
             </a:r>
           </a:p>
         </p:txBody>
@@ -19577,7 +18679,7 @@
                 </a:solidFill>
                 <a:latin typeface="Calibri"/>
               </a:rPr>
-              <a:t>Low confidence — partial data</a:t>
+              <a:t>Person not found in target agency</a:t>
             </a:r>
           </a:p>
         </p:txBody>
